--- a/PPTs/Ch5_ARM_Load_Store_Exercises.pptx
+++ b/PPTs/Ch5_ARM_Load_Store_Exercises.pptx
@@ -1673,125 +1673,7 @@
         <p:txBody>
           <a:bodyPr/>
           <a:lstStyle/>
-          <a:p>
-            <a:r>
-              <a:rPr lang="en-US" dirty="0"/>
-              <a:t>You are absolutely correct! For LDRSH R7, [R2, #2] in little-endian, the result is 0x00002345.image.jpg</a:t>
-            </a:r>
-          </a:p>
-          <a:p>
-            <a:r>
-              <a:rPr lang="en-US" dirty="0"/>
-              <a:t>After STR stores 0x23456789 at address 8:</a:t>
-            </a:r>
-          </a:p>
-          <a:p>
-            <a:r>
-              <a:rPr lang="en-US" b="1" dirty="0"/>
-              <a:t>Big-endian layout:</a:t>
-            </a:r>
-          </a:p>
-          <a:p>
-            <a:r>
-              <a:rPr lang="en-US" dirty="0"/>
-              <a:t>Address 8: 0x23, Address 9: 0x45, Address 10: 0x67, Address 11: 0x89</a:t>
-            </a:r>
-          </a:p>
-          <a:p>
-            <a:r>
-              <a:rPr lang="en-US" b="1" dirty="0"/>
-              <a:t>Little-endian layout:</a:t>
-            </a:r>
-          </a:p>
-          <a:p>
-            <a:r>
-              <a:rPr lang="en-US" dirty="0"/>
-              <a:t>Address 8: 0x89, Address 9: 0x67, Address 10: 0x45, Address 11: 0x23</a:t>
-            </a:r>
-          </a:p>
-          <a:p>
-            <a:r>
-              <a:rPr lang="en-US" b="1" dirty="0"/>
-              <a:t>Results for each instruction:</a:t>
-            </a:r>
-          </a:p>
-          <a:p>
-            <a:r>
-              <a:rPr lang="en-US" b="1" dirty="0"/>
-              <a:t>LDRB R7, [R2, #1]</a:t>
-            </a:r>
-            <a:r>
-              <a:rPr lang="en-US" dirty="0"/>
-              <a:t> (byte at address 9):</a:t>
-            </a:r>
-          </a:p>
-          <a:p>
-            <a:r>
-              <a:rPr lang="en-US" dirty="0"/>
-              <a:t>Big-endian: R7 = 0x00000045</a:t>
-            </a:r>
-          </a:p>
-          <a:p>
-            <a:r>
-              <a:rPr lang="en-US" dirty="0"/>
-              <a:t>Little-endian: R7 = 0x00000067</a:t>
-            </a:r>
-          </a:p>
-          <a:p>
-            <a:r>
-              <a:rPr lang="en-US" b="1" dirty="0"/>
-              <a:t>LDRSH R7, [R2, #1]</a:t>
-            </a:r>
-            <a:r>
-              <a:rPr lang="en-US" dirty="0"/>
-              <a:t> (halfword at addresses 9-10):</a:t>
-            </a:r>
-          </a:p>
-          <a:p>
-            <a:r>
-              <a:rPr lang="en-US" dirty="0"/>
-              <a:t>Big-endian: bytes 0x45, 0x67 → 0x4567 → R7 = 0x00004567</a:t>
-            </a:r>
-          </a:p>
-          <a:p>
-            <a:r>
-              <a:rPr lang="en-US" dirty="0"/>
-              <a:t>Little-endian: bytes 0x67, 0x45 → 0x4567 → R7 = 0x00004567</a:t>
-            </a:r>
-          </a:p>
-          <a:p>
-            <a:r>
-              <a:rPr lang="en-US" b="1" dirty="0"/>
-              <a:t>LDRSH R7, [R2, #2]</a:t>
-            </a:r>
-            <a:r>
-              <a:rPr lang="en-US" dirty="0"/>
-              <a:t> (halfword at addresses 10-11):</a:t>
-            </a:r>
-          </a:p>
-          <a:p>
-            <a:r>
-              <a:rPr lang="en-US" dirty="0"/>
-              <a:t>Big-endian: bytes 0x67, 0x89 → 0x6789 → R7 = 0x00006789</a:t>
-            </a:r>
-          </a:p>
-          <a:p>
-            <a:r>
-              <a:rPr lang="en-US" dirty="0"/>
-              <a:t>Little-endian: bytes 0x45, 0x23 → 0x2345 → R7 = 0x00002345</a:t>
-            </a:r>
-          </a:p>
-          <a:p>
-            <a:r>
-              <a:rPr lang="en-US" dirty="0"/>
-              <a:t>I was wrong earlier - in little-endian, the halfword at offset +2 consists of bytes 0x45 (at address 10) and 0x23 (at address 11), which reconstructs to 0x2345, not </a:t>
-            </a:r>
-            <a:r>
-              <a:rPr lang="en-US"/>
-              <a:t>0x4523.</a:t>
-            </a:r>
-            <a:endParaRPr lang="en-US" dirty="0"/>
-          </a:p>
+          <a:p/>
         </p:txBody>
       </p:sp>
     </p:spTree>
@@ -5938,7 +5820,7 @@
           <a:p>
             <a:r>
               <a:rPr lang="en-US" b="0" dirty="0"/>
-              <a:t>Fall 2025</a:t>
+              <a:t>Fall 2026</a:t>
             </a:r>
           </a:p>
         </p:txBody>
@@ -6184,7 +6066,9 @@
           </a:prstGeom>
         </p:spPr>
         <p:txBody>
-          <a:bodyPr/>
+          <a:bodyPr>
+            <a:normAutofit fontScale="90000" lnSpcReduction="10000"/>
+          </a:bodyPr>
           <a:lstStyle>
             <a:lvl1pPr marL="342900" indent="-342900" algn="l" defTabSz="457200" rtl="0" eaLnBrk="1" latinLnBrk="0" hangingPunct="1">
               <a:spcBef>
@@ -6403,7 +6287,24 @@
                   <a:prstClr val="black"/>
                 </a:solidFill>
               </a:rPr>
-              <a:t>(d) longs</a:t>
+              <a:t>(d) longs (32-bit ARM/Cortex-M: long = 4 bytes)</a:t>
+            </a:r>
+            <a:endParaRPr lang="en-US" sz="1800" b="0" dirty="0">
+              <a:solidFill>
+                <a:prstClr val="black"/>
+              </a:solidFill>
+              <a:latin typeface="Calibri"/>
+            </a:endParaRPr>
+          </a:p>
+          <a:p>
+            <a:pPr marL="657225" lvl="1" indent="-257175" defTabSz="342900"/>
+            <a:r>
+              <a:rPr lang="en-US" sz="1800" b="0" dirty="0">
+                <a:solidFill>
+                  <a:prstClr val="black"/>
+                </a:solidFill>
+              </a:rPr>
+              <a:t>(e) long longs (8 bytes)</a:t>
             </a:r>
             <a:endParaRPr lang="en-US" sz="1800" b="0" dirty="0">
               <a:solidFill>
@@ -7415,7 +7316,7 @@
             </a:pPr>
             <a:r>
               <a:rPr lang="en-US" b="0" dirty="0"/>
-              <a:t>Assume that memory and registers r0 through r3 appear as follows. Suppose r3 = 0x8000. Describe the memory and register contents after executing each instruction (individually, not sequentially):</a:t>
+              <a:t>Assume that memory and registers r0 through r3 appear as follows. Suppose r3 = 0x8000 (for LDMDB: r3 = 0x800C). Describe the memory and register contents after executing each instruction (individually, not sequentially):</a:t>
             </a:r>
           </a:p>
           <a:p>
@@ -7437,7 +7338,7 @@
             </a:pPr>
             <a:r>
               <a:rPr lang="en-US" b="0" dirty="0"/>
-              <a:t>Or LDMIB r3!, {r2, r1, r0}</a:t>
+              <a:t>Or LDMIA r3!, {r2, r1, r0}</a:t>
             </a:r>
           </a:p>
           <a:p>
@@ -7448,7 +7349,7 @@
             </a:pPr>
             <a:r>
               <a:rPr lang="en-US" b="0" dirty="0"/>
-              <a:t>Or LDMIB r3!, {r1, r2, r0}</a:t>
+              <a:t>LDMDB r3!, {r0, r1, r2}</a:t>
             </a:r>
           </a:p>
         </p:txBody>
@@ -7580,7 +7481,7 @@
           <a:p>
             <a:r>
               <a:rPr lang="en-US" dirty="0"/>
-              <a:t>Suppose R2 and R5 hold the values 8 and 0x23456789 After following code runs with big-endian ordering, what value is in R7? How about with little-endian ordering?</a:t>
+              <a:t>Suppose R2 and R5 hold the values 8 and 0x23456789. After following code runs with big-endian ordering, what value is in R7? How about with little-endian ordering? (Assume Cortex-M3/M4, which allow unaligned halfword access.)</a:t>
             </a:r>
           </a:p>
           <a:p>
@@ -9948,7 +9849,7 @@
             </a:pPr>
             <a:r>
               <a:rPr lang="en-US" sz="2000" b="0" dirty="0"/>
-              <a:t>Compute register and memory values at each step of this program, given initial register values and memory contents, assuming little-endian ordering. (Memory addresses increase from top to bottom, and from left to right in the table.)</a:t>
+              <a:t>Compute register and memory values at each step of this program, given initial register values and memory contents, assuming little-endian ordering. (Memory addresses increase from bottom to top, and from left to right in the table.)</a:t>
             </a:r>
           </a:p>
         </p:txBody>
@@ -10167,7 +10068,7 @@
             </a:r>
             <a:r>
               <a:rPr lang="en-US" sz="2800" dirty="0"/>
-              <a:t>(Memory addresses increase from top to bottom, and from left to right in the table.) </a:t>
+              <a:t>(Memory addresses increase from bottom to top, and from left to right in the table.) </a:t>
             </a:r>
             <a:r>
               <a:rPr lang="en-US" dirty="0"/>
@@ -13173,7 +13074,7 @@
                   <a:cs typeface="Consolas" panose="020B0609020204030204" pitchFamily="49" charset="0"/>
                   <a:sym typeface="Courier New" charset="0"/>
                 </a:rPr>
-                <a:t>0015</a:t>
+                <a:t>0x000F</a:t>
               </a:r>
             </a:p>
           </p:txBody>
@@ -13244,7 +13145,7 @@
                   <a:cs typeface="Consolas" panose="020B0609020204030204" pitchFamily="49" charset="0"/>
                   <a:sym typeface="Courier New" charset="0"/>
                 </a:rPr>
-                <a:t>0014</a:t>
+                <a:t>0x000E</a:t>
               </a:r>
             </a:p>
           </p:txBody>
@@ -13315,7 +13216,7 @@
                   <a:cs typeface="Consolas" panose="020B0609020204030204" pitchFamily="49" charset="0"/>
                   <a:sym typeface="Courier New" charset="0"/>
                 </a:rPr>
-                <a:t>0013</a:t>
+                <a:t>0x000D</a:t>
               </a:r>
             </a:p>
           </p:txBody>
@@ -13386,7 +13287,7 @@
                   <a:cs typeface="Consolas" panose="020B0609020204030204" pitchFamily="49" charset="0"/>
                   <a:sym typeface="Courier New" charset="0"/>
                 </a:rPr>
-                <a:t>0012</a:t>
+                <a:t>0x000C</a:t>
               </a:r>
             </a:p>
           </p:txBody>
@@ -13457,7 +13358,7 @@
                   <a:cs typeface="Consolas" panose="020B0609020204030204" pitchFamily="49" charset="0"/>
                   <a:sym typeface="Courier New" charset="0"/>
                 </a:rPr>
-                <a:t>0011</a:t>
+                <a:t>0x000B</a:t>
               </a:r>
             </a:p>
           </p:txBody>
@@ -13528,7 +13429,7 @@
                   <a:cs typeface="Consolas" panose="020B0609020204030204" pitchFamily="49" charset="0"/>
                   <a:sym typeface="Courier New" charset="0"/>
                 </a:rPr>
-                <a:t>0010</a:t>
+                <a:t>0x000A</a:t>
               </a:r>
             </a:p>
           </p:txBody>
@@ -13599,7 +13500,7 @@
                   <a:cs typeface="Consolas" panose="020B0609020204030204" pitchFamily="49" charset="0"/>
                   <a:sym typeface="Courier New" charset="0"/>
                 </a:rPr>
-                <a:t>0009</a:t>
+                <a:t>0x0009</a:t>
               </a:r>
             </a:p>
           </p:txBody>
@@ -13670,7 +13571,7 @@
                   <a:cs typeface="Consolas" panose="020B0609020204030204" pitchFamily="49" charset="0"/>
                   <a:sym typeface="Courier New" charset="0"/>
                 </a:rPr>
-                <a:t>0008</a:t>
+                <a:t>0x0008</a:t>
               </a:r>
             </a:p>
           </p:txBody>
@@ -13741,7 +13642,7 @@
                   <a:cs typeface="Consolas" panose="020B0609020204030204" pitchFamily="49" charset="0"/>
                   <a:sym typeface="Courier New" charset="0"/>
                 </a:rPr>
-                <a:t>0007</a:t>
+                <a:t>0x0007</a:t>
               </a:r>
             </a:p>
           </p:txBody>
@@ -13812,7 +13713,7 @@
                   <a:cs typeface="Consolas" panose="020B0609020204030204" pitchFamily="49" charset="0"/>
                   <a:sym typeface="Courier New" charset="0"/>
                 </a:rPr>
-                <a:t>0006</a:t>
+                <a:t>0x0006</a:t>
               </a:r>
             </a:p>
           </p:txBody>
@@ -13883,7 +13784,7 @@
                   <a:cs typeface="Consolas" panose="020B0609020204030204" pitchFamily="49" charset="0"/>
                   <a:sym typeface="Courier New" charset="0"/>
                 </a:rPr>
-                <a:t>0005</a:t>
+                <a:t>0x0005</a:t>
               </a:r>
             </a:p>
           </p:txBody>
@@ -13954,7 +13855,7 @@
                   <a:cs typeface="Consolas" panose="020B0609020204030204" pitchFamily="49" charset="0"/>
                   <a:sym typeface="Courier New" charset="0"/>
                 </a:rPr>
-                <a:t>0004</a:t>
+                <a:t>0x0004</a:t>
               </a:r>
             </a:p>
           </p:txBody>
@@ -14647,7 +14548,7 @@
                   <a:cs typeface="Consolas" panose="020B0609020204030204" pitchFamily="49" charset="0"/>
                   <a:sym typeface="Courier New" charset="0"/>
                 </a:rPr>
-                <a:t>0003</a:t>
+                <a:t>0x0003</a:t>
               </a:r>
             </a:p>
           </p:txBody>
@@ -14789,7 +14690,7 @@
                   <a:cs typeface="Consolas" panose="020B0609020204030204" pitchFamily="49" charset="0"/>
                   <a:sym typeface="Courier New" charset="0"/>
                 </a:rPr>
-                <a:t>0002</a:t>
+                <a:t>0x0002</a:t>
               </a:r>
             </a:p>
           </p:txBody>
@@ -14931,7 +14832,7 @@
                   <a:cs typeface="Consolas" panose="020B0609020204030204" pitchFamily="49" charset="0"/>
                   <a:sym typeface="Courier New" charset="0"/>
                 </a:rPr>
-                <a:t>0001</a:t>
+                <a:t>0x0001</a:t>
               </a:r>
             </a:p>
           </p:txBody>
@@ -15073,7 +14974,7 @@
                   <a:cs typeface="Consolas" panose="020B0609020204030204" pitchFamily="49" charset="0"/>
                   <a:sym typeface="Courier New" charset="0"/>
                 </a:rPr>
-                <a:t>0000</a:t>
+                <a:t>0x0000</a:t>
               </a:r>
             </a:p>
           </p:txBody>
@@ -20483,7 +20384,7 @@
             <a:pPr lvl="0"/>
             <a:r>
               <a:rPr lang="en-US" b="1" dirty="0"/>
-              <a:t>LDSB r1, [r0]</a:t>
+              <a:t>LDRSB r1, [r0]</a:t>
             </a:r>
             <a:r>
               <a:rPr lang="en-US" dirty="0"/>
@@ -21183,7 +21084,7 @@
                   <a:prstClr val="black"/>
                 </a:solidFill>
               </a:rPr>
-              <a:t>Q:  Assume a byte-addressable memory with a data bus that is 32 bits (4 bytes) wide. Consider 16 bytes of memory (addresses 0 to 15) arranged as four 32-bit words (4 bytes each). </a:t>
+              <a:t>Q:  Assume a byte-addressable memory with a data bus that is 32 bits (4 bytes) wide. </a:t>
             </a:r>
             <a:r>
               <a:rPr lang="en-US" altLang="zh-CN" sz="2000" b="0" dirty="0">
@@ -21502,7 +21403,7 @@
                   <a:prstClr val="black"/>
                 </a:solidFill>
               </a:rPr>
-              <a:t>Q:  Assume a byte-addressable memory with a data bus that is 32 bits (4 bytes) wide. Consider 16 bytes of memory (addresses 0 to 15) arranged as four 32-bit words (4 bytes each). </a:t>
+              <a:t>Q:  Assume a byte-addressable memory with a data bus that is 32 bits (4 bytes) wide. Consider 16 bytes of memory (addresses 96 to 111) arranged as four 32-bit words (4 bytes each). </a:t>
             </a:r>
           </a:p>
           <a:p>
@@ -21535,7 +21436,7 @@
                   <a:prstClr val="black"/>
                 </a:solidFill>
               </a:rPr>
-              <a:t>(b) How many memory cycles are required to read the word at address 102?</a:t>
+              <a:t>(c) How many memory cycles are required to read the word at address 102?</a:t>
             </a:r>
           </a:p>
           <a:p>
@@ -21546,7 +21447,7 @@
                   <a:prstClr val="black"/>
                 </a:solidFill>
               </a:rPr>
-              <a:t>(c) How many memory cycles are required to read the half word at address 102?</a:t>
+              <a:t>(d) How many memory cycles are required to read the half word at address 102?</a:t>
             </a:r>
             <a:endParaRPr lang="en-US" sz="1000" b="0" dirty="0">
               <a:solidFill>
